--- a/media/resources/files/Onduktar_KoboytuuJenilOrtoOOR_vRPuLhl.pptx
+++ b/media/resources/files/Onduktar_KoboytuuJenilOrtoOOR_vRPuLhl.pptx
@@ -8544,7 +8544,7 @@
                 <a:ea typeface="+mn-ea"/>
                 <a:cs typeface="+mn-cs"/>
               </a:rPr>
-              <a:t>Турдуу пикирлер учун ыраазычылык билдиребиз.</a:t>
+              <a:t>Түрдүү пикирлер үчүн ыраазычылык билдиребиз.</a:t>
             </a:r>
           </a:p>
           <a:p>

--- a/media/resources/files/Onduktar_KoboytuuJenilOrtoOOR_vRPuLhl.pptx
+++ b/media/resources/files/Onduktar_KoboytuuJenilOrtoOOR_vRPuLhl.pptx
@@ -2020,7 +2020,7 @@
           <a:p>
             <a:r>
               <a:rPr lang="en-GB" sz="2000" dirty="0"/>
-              <a:t>2 × 0.3   =</a:t>
+              <a:t>2 × 0,3   =</a:t>
             </a:r>
           </a:p>
         </p:txBody>
@@ -2096,7 +2096,7 @@
           <a:p>
             <a:r>
               <a:rPr lang="en-GB" sz="2000" dirty="0"/>
-              <a:t>2 × 0.7   = </a:t>
+              <a:t>2 × 0,7   = </a:t>
             </a:r>
           </a:p>
         </p:txBody>
@@ -2172,7 +2172,7 @@
           <a:p>
             <a:r>
               <a:rPr lang="en-GB" sz="2000" dirty="0"/>
-              <a:t>3 × 0.7   =</a:t>
+              <a:t>3 × 0,7   =</a:t>
             </a:r>
           </a:p>
         </p:txBody>
@@ -2248,7 +2248,7 @@
           <a:p>
             <a:r>
               <a:rPr lang="en-GB" sz="2000" dirty="0"/>
-              <a:t>0.8 × 4  =</a:t>
+              <a:t>0,8 × 4  =</a:t>
             </a:r>
           </a:p>
         </p:txBody>
@@ -2324,7 +2324,7 @@
           <a:p>
             <a:r>
               <a:rPr lang="en-GB" sz="2000" dirty="0"/>
-              <a:t>1.1 × 6  =</a:t>
+              <a:t>1,1 × 6  =</a:t>
             </a:r>
           </a:p>
         </p:txBody>
@@ -2400,7 +2400,7 @@
           <a:p>
             <a:r>
               <a:rPr lang="en-GB" sz="2000" dirty="0"/>
-              <a:t>2.4 × 2  =</a:t>
+              <a:t>2,4 × 2  =</a:t>
             </a:r>
           </a:p>
         </p:txBody>
@@ -2476,7 +2476,7 @@
           <a:p>
             <a:r>
               <a:rPr lang="en-GB" sz="2000" dirty="0"/>
-              <a:t>3 × 2.6  =</a:t>
+              <a:t>3 × 2,6  =</a:t>
             </a:r>
           </a:p>
         </p:txBody>
@@ -2593,7 +2593,7 @@
           <a:p>
             <a:r>
               <a:rPr lang="en-GB" sz="2000" dirty="0"/>
-              <a:t>0.3 × 0.3  =</a:t>
+              <a:t>0,3 × 0,3  =</a:t>
             </a:r>
           </a:p>
         </p:txBody>
@@ -2669,7 +2669,7 @@
           <a:p>
             <a:r>
               <a:rPr lang="en-GB" sz="2000" dirty="0"/>
-              <a:t>0.5 × 0.7  =</a:t>
+              <a:t>0,5 × 0,7  =</a:t>
             </a:r>
           </a:p>
         </p:txBody>
@@ -2745,7 +2745,7 @@
           <a:p>
             <a:r>
               <a:rPr lang="en-GB" sz="2000" dirty="0"/>
-              <a:t>0.4 × 0.5  =</a:t>
+              <a:t>0,4 × 0,5  =</a:t>
             </a:r>
           </a:p>
         </p:txBody>
@@ -2821,7 +2821,7 @@
           <a:p>
             <a:r>
               <a:rPr lang="en-GB" sz="2000" dirty="0"/>
-              <a:t>1.2 × 0.3  =</a:t>
+              <a:t>1,2 × 0,3  =</a:t>
             </a:r>
           </a:p>
         </p:txBody>
@@ -2897,7 +2897,7 @@
           <a:p>
             <a:r>
               <a:rPr lang="en-GB" sz="2000" dirty="0"/>
-              <a:t>0.4 × 1.6  =</a:t>
+              <a:t>0,4 × 1,6  =</a:t>
             </a:r>
           </a:p>
         </p:txBody>
@@ -2973,7 +2973,7 @@
           <a:p>
             <a:r>
               <a:rPr lang="en-GB" sz="2000" dirty="0"/>
-              <a:t>1.2 × 1.3  =</a:t>
+              <a:t>1,2 × 1,3  =</a:t>
             </a:r>
           </a:p>
         </p:txBody>
@@ -3049,7 +3049,7 @@
           <a:p>
             <a:r>
               <a:rPr lang="en-GB" sz="2000" dirty="0"/>
-              <a:t>2.7 × 1.1  =</a:t>
+              <a:t>2,7 × 1,1  =</a:t>
             </a:r>
           </a:p>
         </p:txBody>
@@ -3166,7 +3166,7 @@
           <a:p>
             <a:r>
               <a:rPr lang="en-GB" sz="2000" dirty="0"/>
-              <a:t>1.2 × 0.7  =</a:t>
+              <a:t>1,2 × 0,7  =</a:t>
             </a:r>
           </a:p>
         </p:txBody>
@@ -3242,7 +3242,7 @@
           <a:p>
             <a:r>
               <a:rPr lang="en-GB" sz="2000" dirty="0"/>
-              <a:t>1.4 × 1.8  =</a:t>
+              <a:t>1,4 × 1,8  =</a:t>
             </a:r>
           </a:p>
         </p:txBody>
@@ -3318,7 +3318,7 @@
           <a:p>
             <a:r>
               <a:rPr lang="en-GB" sz="2000" dirty="0"/>
-              <a:t>0.2 × 0.16  =</a:t>
+              <a:t>0,2 × 0,16  =</a:t>
             </a:r>
           </a:p>
         </p:txBody>
@@ -3394,7 +3394,7 @@
           <a:p>
             <a:r>
               <a:rPr lang="en-GB" sz="2000" dirty="0"/>
-              <a:t>1.6 × 0.05  =</a:t>
+              <a:t>1,6 × 0,05  =</a:t>
             </a:r>
           </a:p>
         </p:txBody>
@@ -3470,7 +3470,7 @@
           <a:p>
             <a:r>
               <a:rPr lang="en-GB" sz="2000" dirty="0"/>
-              <a:t>2.2 × 0.15  =</a:t>
+              <a:t>2,2 × 0,15  =</a:t>
             </a:r>
           </a:p>
         </p:txBody>
@@ -3546,7 +3546,7 @@
           <a:p>
             <a:r>
               <a:rPr lang="en-GB" sz="2000" dirty="0"/>
-              <a:t>1.24 × 0.6  =</a:t>
+              <a:t>1,24 × 0,6  =</a:t>
             </a:r>
           </a:p>
         </p:txBody>
@@ -3622,7 +3622,7 @@
           <a:p>
             <a:r>
               <a:rPr lang="en-GB" sz="2000" dirty="0"/>
-              <a:t>2.21 × 3.5  =</a:t>
+              <a:t>2,21 × 3,5  =</a:t>
             </a:r>
           </a:p>
         </p:txBody>
@@ -4260,7 +4260,7 @@
           <a:p>
             <a:r>
               <a:rPr lang="en-GB" sz="2000" dirty="0"/>
-              <a:t>2 × 0.3  =</a:t>
+              <a:t>2 × 0,3  =</a:t>
             </a:r>
           </a:p>
         </p:txBody>
@@ -4303,7 +4303,7 @@
             <a:pPr algn="ctr"/>
             <a:r>
               <a:rPr lang="en-GB" sz="2000" dirty="0"/>
-              <a:t>0.6</a:t>
+              <a:t>0,6</a:t>
             </a:r>
           </a:p>
         </p:txBody>
@@ -4379,7 +4379,7 @@
           <a:p>
             <a:r>
               <a:rPr lang="en-GB" sz="2000" dirty="0"/>
-              <a:t>2 × 0.7  =</a:t>
+              <a:t>2 × 0,7  =</a:t>
             </a:r>
           </a:p>
         </p:txBody>
@@ -4422,7 +4422,7 @@
             <a:pPr algn="ctr"/>
             <a:r>
               <a:rPr lang="en-GB" sz="2000" dirty="0"/>
-              <a:t>1.4</a:t>
+              <a:t>1,4</a:t>
             </a:r>
           </a:p>
         </p:txBody>
@@ -4498,7 +4498,7 @@
           <a:p>
             <a:r>
               <a:rPr lang="en-GB" sz="2000" dirty="0"/>
-              <a:t>3 × 0.7  =</a:t>
+              <a:t>3 × 0,7  =</a:t>
             </a:r>
           </a:p>
         </p:txBody>
@@ -4541,7 +4541,7 @@
             <a:pPr algn="ctr"/>
             <a:r>
               <a:rPr lang="en-GB" sz="2000" dirty="0"/>
-              <a:t>2.1</a:t>
+              <a:t>2,1</a:t>
             </a:r>
           </a:p>
         </p:txBody>
@@ -4617,7 +4617,7 @@
           <a:p>
             <a:r>
               <a:rPr lang="en-GB" sz="2000" dirty="0"/>
-              <a:t>0.8 × 4  =</a:t>
+              <a:t>0,8 × 4  =</a:t>
             </a:r>
           </a:p>
         </p:txBody>
@@ -4660,7 +4660,7 @@
             <a:pPr algn="ctr"/>
             <a:r>
               <a:rPr lang="en-GB" sz="2000" dirty="0"/>
-              <a:t>3.2</a:t>
+              <a:t>3,2</a:t>
             </a:r>
           </a:p>
         </p:txBody>
@@ -4736,7 +4736,7 @@
           <a:p>
             <a:r>
               <a:rPr lang="en-GB" sz="2000" dirty="0"/>
-              <a:t>1.1 × 6  =</a:t>
+              <a:t>1,1 × 6  =</a:t>
             </a:r>
           </a:p>
         </p:txBody>
@@ -4779,7 +4779,7 @@
             <a:pPr algn="ctr"/>
             <a:r>
               <a:rPr lang="en-GB" sz="2000" dirty="0"/>
-              <a:t>6.6</a:t>
+              <a:t>6,6</a:t>
             </a:r>
           </a:p>
         </p:txBody>
@@ -4855,7 +4855,7 @@
           <a:p>
             <a:r>
               <a:rPr lang="en-GB" sz="2000" dirty="0"/>
-              <a:t>2.4 × 2  =</a:t>
+              <a:t>2,4 × 2  =</a:t>
             </a:r>
           </a:p>
         </p:txBody>
@@ -4898,7 +4898,7 @@
             <a:pPr algn="ctr"/>
             <a:r>
               <a:rPr lang="en-GB" sz="2000" dirty="0"/>
-              <a:t>4.8</a:t>
+              <a:t>4,8</a:t>
             </a:r>
           </a:p>
         </p:txBody>
@@ -4974,7 +4974,7 @@
           <a:p>
             <a:r>
               <a:rPr lang="en-GB" sz="2000" dirty="0"/>
-              <a:t>3 × 2.6  =</a:t>
+              <a:t>3 × 2,6  =</a:t>
             </a:r>
           </a:p>
         </p:txBody>
@@ -5017,7 +5017,7 @@
             <a:pPr algn="ctr"/>
             <a:r>
               <a:rPr lang="en-GB" sz="2000" dirty="0"/>
-              <a:t>7.8</a:t>
+              <a:t>7,8</a:t>
             </a:r>
           </a:p>
         </p:txBody>
@@ -5134,7 +5134,7 @@
           <a:p>
             <a:r>
               <a:rPr lang="en-GB" sz="2000" dirty="0"/>
-              <a:t>0.3 × 0.3  =</a:t>
+              <a:t>0,3 × 0,3  =</a:t>
             </a:r>
           </a:p>
         </p:txBody>
@@ -5177,7 +5177,7 @@
             <a:pPr algn="ctr"/>
             <a:r>
               <a:rPr lang="en-GB" sz="2000" dirty="0"/>
-              <a:t>0.09</a:t>
+              <a:t>0,09</a:t>
             </a:r>
           </a:p>
         </p:txBody>
@@ -5253,7 +5253,7 @@
           <a:p>
             <a:r>
               <a:rPr lang="en-GB" sz="2000" dirty="0"/>
-              <a:t>0.5 × 0.7  =</a:t>
+              <a:t>0,5 × 0,7  =</a:t>
             </a:r>
           </a:p>
         </p:txBody>
@@ -5296,7 +5296,7 @@
             <a:pPr algn="ctr"/>
             <a:r>
               <a:rPr lang="en-GB" sz="2000" dirty="0"/>
-              <a:t>0.35</a:t>
+              <a:t>0,35</a:t>
             </a:r>
           </a:p>
         </p:txBody>
@@ -5372,7 +5372,7 @@
           <a:p>
             <a:r>
               <a:rPr lang="en-GB" sz="2000" dirty="0"/>
-              <a:t>0.4 × 0.5  =</a:t>
+              <a:t>0,4 × 0,5  =</a:t>
             </a:r>
           </a:p>
         </p:txBody>
@@ -5415,7 +5415,7 @@
             <a:pPr algn="ctr"/>
             <a:r>
               <a:rPr lang="en-GB" sz="2000" dirty="0"/>
-              <a:t>0.2</a:t>
+              <a:t>0,2</a:t>
             </a:r>
           </a:p>
         </p:txBody>
@@ -5491,7 +5491,7 @@
           <a:p>
             <a:r>
               <a:rPr lang="en-GB" sz="2000" dirty="0"/>
-              <a:t>1.2 × 0.3  =</a:t>
+              <a:t>1,2 × 0,3  =</a:t>
             </a:r>
           </a:p>
         </p:txBody>
@@ -5534,7 +5534,7 @@
             <a:pPr algn="ctr"/>
             <a:r>
               <a:rPr lang="en-GB" sz="2000" dirty="0"/>
-              <a:t>0.36</a:t>
+              <a:t>0,36</a:t>
             </a:r>
           </a:p>
         </p:txBody>
@@ -5610,7 +5610,7 @@
           <a:p>
             <a:r>
               <a:rPr lang="en-GB" sz="2000" dirty="0"/>
-              <a:t>0.4 × 1.6  =</a:t>
+              <a:t>0,4 × 1,6  =</a:t>
             </a:r>
           </a:p>
         </p:txBody>
@@ -5653,7 +5653,7 @@
             <a:pPr algn="ctr"/>
             <a:r>
               <a:rPr lang="en-GB" sz="2000" dirty="0"/>
-              <a:t>0.64</a:t>
+              <a:t>0,64</a:t>
             </a:r>
           </a:p>
         </p:txBody>
@@ -5729,7 +5729,7 @@
           <a:p>
             <a:r>
               <a:rPr lang="en-GB" sz="2000" dirty="0"/>
-              <a:t>1.2 × 1.3  =</a:t>
+              <a:t>1,2 × 1,3  =</a:t>
             </a:r>
           </a:p>
         </p:txBody>
@@ -5772,7 +5772,7 @@
             <a:pPr algn="ctr"/>
             <a:r>
               <a:rPr lang="en-GB" sz="2000" dirty="0"/>
-              <a:t>1.56</a:t>
+              <a:t>1,56</a:t>
             </a:r>
           </a:p>
         </p:txBody>
@@ -5848,7 +5848,7 @@
           <a:p>
             <a:r>
               <a:rPr lang="en-GB" sz="2000" dirty="0"/>
-              <a:t>2.7 × 1.1  =</a:t>
+              <a:t>2,7 × 1,1  =</a:t>
             </a:r>
           </a:p>
         </p:txBody>
@@ -5891,7 +5891,7 @@
             <a:pPr algn="ctr"/>
             <a:r>
               <a:rPr lang="en-GB" sz="2000" dirty="0"/>
-              <a:t>2.97</a:t>
+              <a:t>2,97</a:t>
             </a:r>
           </a:p>
         </p:txBody>
@@ -6008,7 +6008,7 @@
           <a:p>
             <a:r>
               <a:rPr lang="en-GB" sz="2000" dirty="0"/>
-              <a:t>1.2 × 0.7  =</a:t>
+              <a:t>1,2 × 0,7  =</a:t>
             </a:r>
           </a:p>
         </p:txBody>
@@ -6051,7 +6051,7 @@
             <a:pPr algn="ctr"/>
             <a:r>
               <a:rPr lang="en-GB" sz="2000" dirty="0"/>
-              <a:t>0.84</a:t>
+              <a:t>0,84</a:t>
             </a:r>
           </a:p>
         </p:txBody>
@@ -6127,7 +6127,7 @@
           <a:p>
             <a:r>
               <a:rPr lang="en-GB" sz="2000" dirty="0"/>
-              <a:t>1.4 × 1.8  =</a:t>
+              <a:t>1,4 × 1,8  =</a:t>
             </a:r>
           </a:p>
         </p:txBody>
@@ -6170,7 +6170,7 @@
             <a:pPr algn="ctr"/>
             <a:r>
               <a:rPr lang="en-GB" sz="2000" dirty="0"/>
-              <a:t>2.52</a:t>
+              <a:t>2,52</a:t>
             </a:r>
           </a:p>
         </p:txBody>
@@ -6246,7 +6246,7 @@
           <a:p>
             <a:r>
               <a:rPr lang="en-GB" sz="2000" dirty="0"/>
-              <a:t>0.2 × 0.16  =</a:t>
+              <a:t>0,2 × 0,16  =</a:t>
             </a:r>
           </a:p>
         </p:txBody>
@@ -6289,7 +6289,7 @@
             <a:pPr algn="ctr"/>
             <a:r>
               <a:rPr lang="en-GB" sz="2000" dirty="0"/>
-              <a:t>0.032</a:t>
+              <a:t>0,032</a:t>
             </a:r>
           </a:p>
         </p:txBody>
@@ -6365,7 +6365,7 @@
           <a:p>
             <a:r>
               <a:rPr lang="en-GB" sz="2000" dirty="0"/>
-              <a:t>1.6 × 0.05  =</a:t>
+              <a:t>1,6 × 0,05  =</a:t>
             </a:r>
           </a:p>
         </p:txBody>
@@ -6408,7 +6408,7 @@
             <a:pPr algn="ctr"/>
             <a:r>
               <a:rPr lang="en-GB" sz="2000" dirty="0"/>
-              <a:t>0.08</a:t>
+              <a:t>0,08</a:t>
             </a:r>
           </a:p>
         </p:txBody>
@@ -6484,7 +6484,7 @@
           <a:p>
             <a:r>
               <a:rPr lang="en-GB" sz="2000" dirty="0"/>
-              <a:t>2.2 × 0.15  =</a:t>
+              <a:t>2,2 × 0,15  =</a:t>
             </a:r>
           </a:p>
         </p:txBody>
@@ -6527,7 +6527,7 @@
             <a:pPr algn="ctr"/>
             <a:r>
               <a:rPr lang="en-GB" sz="2000" dirty="0"/>
-              <a:t>0.33</a:t>
+              <a:t>0,33</a:t>
             </a:r>
           </a:p>
         </p:txBody>
@@ -6603,7 +6603,7 @@
           <a:p>
             <a:r>
               <a:rPr lang="en-GB" sz="2000" dirty="0"/>
-              <a:t>1.24 × 0.6  =</a:t>
+              <a:t>1,24 × 0,6  =</a:t>
             </a:r>
           </a:p>
         </p:txBody>
@@ -6646,7 +6646,7 @@
             <a:pPr algn="ctr"/>
             <a:r>
               <a:rPr lang="en-GB" sz="2000" dirty="0"/>
-              <a:t>0.744</a:t>
+              <a:t>0,744</a:t>
             </a:r>
           </a:p>
         </p:txBody>
@@ -6722,7 +6722,7 @@
           <a:p>
             <a:r>
               <a:rPr lang="en-GB" sz="2000" dirty="0"/>
-              <a:t>2.21 × 3.5  =</a:t>
+              <a:t>2,21 × 3,5  =</a:t>
             </a:r>
           </a:p>
         </p:txBody>
@@ -6765,7 +6765,7 @@
             <a:pPr algn="ctr"/>
             <a:r>
               <a:rPr lang="en-GB" sz="2000" dirty="0"/>
-              <a:t>7.735</a:t>
+              <a:t>7,735</a:t>
             </a:r>
           </a:p>
         </p:txBody>
